--- a/it/slides/23-Architettura_dei_Calcolatori-Verm1_sul_Cartridge_Store-Lab.pptx
+++ b/it/slides/23-Architettura_dei_Calcolatori-Verm1_sul_Cartridge_Store-Lab.pptx
@@ -123,42 +123,42 @@
   <p:extLst>
     <p:ext uri="{521415D9-36F7-43E2-AB2F-B90AF26B5E84}">
       <p14:sectionLst xmlns:p14="http://schemas.microsoft.com/office/powerpoint/2010/main">
-        <p14:section name="Apertura" id="{971e8819-1bea-fdf9-addc-4bf4f319c4dd}">
+        <p14:section name="Apertura" id="{7a0fc15d-c272-ba77-8ddb-660b8cc03131}">
           <p14:sldIdLst>
             <p14:sldId id="256"/>
             <p14:sldId id="257"/>
           </p14:sldIdLst>
         </p14:section>
-        <p14:section name="Passo 1: un sorgente, due cartucce" id="{2b5d29de-63db-fbe2-7b99-c6041e89dfdd}">
+        <p14:section name="Passo 1: un sorgente, due cartucce" id="{41870e77-a57f-81bc-571d-db64555eb8bd}">
           <p14:sldIdLst>
             <p14:sldId id="258"/>
             <p14:sldId id="259"/>
           </p14:sldIdLst>
         </p14:section>
-        <p14:section name="Passo 2: un'identità" id="{3e255ab8-5d6d-de7a-c5f1-3b6b3b4e8c81}">
+        <p14:section name="Passo 2: un'identità" id="{782403c3-a6e1-8f58-2f0c-259a5c72690e}">
           <p14:sldIdLst>
             <p14:sldId id="260"/>
             <p14:sldId id="261"/>
           </p14:sldIdLst>
         </p14:section>
-        <p14:section name="Passo 3: la cartuccia porta con sé i documenti" id="{210c96ef-1537-3078-61d1-85ec5be65de9}">
+        <p14:section name="Passo 3: la cartuccia porta con sé i documenti" id="{b3c9b401-ca4d-c706-9f4f-6378d33a7fe6}">
           <p14:sldIdLst>
             <p14:sldId id="262"/>
             <p14:sldId id="263"/>
           </p14:sldIdLst>
         </p14:section>
-        <p14:section name="Passo 4: il bundle" id="{542534c0-f9da-c421-8e08-959a8e4a0ddd}">
+        <p14:section name="Passo 4: il bundle" id="{7b8a4575-85c1-dd9c-dd8f-5e524ff83287}">
           <p14:sldIdLst>
             <p14:sldId id="264"/>
             <p14:sldId id="265"/>
           </p14:sldIdLst>
         </p14:section>
-        <p14:section name="Passo 5: la pubblicazione" id="{bfdacd6c-d0e8-421c-1ae0-bedd81530c1d}">
+        <p14:section name="Passo 5: la pubblicazione" id="{83e41d6a-1a2d-8702-3529-8bcb082d3a7a}">
           <p14:sldIdLst>
             <p14:sldId id="266"/>
           </p14:sldIdLst>
         </p14:section>
-        <p14:section name="Eseguire e provare" id="{dd09bc2b-0cee-ca1c-f47d-3f0944a66514}">
+        <p14:section name="Eseguire e provare" id="{42dd8ae2-0f17-b34f-2450-06e3dba301c1}">
           <p14:sldIdLst>
             <p14:sldId id="267"/>
             <p14:sldId id="268"/>
@@ -167,7 +167,7 @@
             <p14:sldId id="271"/>
           </p14:sldIdLst>
         </p14:section>
-        <p14:section name="Esercizi" id="{ace376eb-a625-2ec1-dbff-5bc9759a1661}">
+        <p14:section name="Esercizi" id="{b9395c9d-a170-2d41-560f-bd92671387df}">
           <p14:sldIdLst>
             <p14:sldId id="272"/>
           </p14:sldIdLst>
@@ -1652,7 +1652,7 @@
           <a:p>
             <a:r>
               <a:rPr lang="en-US" dirty="0"/>
-              <a:t>Il manifesto è un file JSON che descrive il gioco, e i suoi campi vanno letti uno per uno. id è un nome unico al mondo. version consiste di tre numeri. title è ciò che il giocatore legge. summary è una descrizione di una riga per lo scaffale, description un paragrafo. Seguono autori, licenza e tag. In fondo, assets nomina l'icona e architectures dice quale file di cartuccia serve quale target. Il file si crea con un editor di testo nella cartella del gioco.
+              <a:t>Il manifesto è un file JSON che descrive il gioco; JSON è un formato di testo semplice per dati strutturati, in cui ogni valore si scrive dopo il suo nome, tra parentesi graffe. I suoi campi vanno letti uno per uno. id è un nome unico al mondo. version consiste di tre numeri. title è ciò che il giocatore legge. summary è una descrizione di una riga per lo scaffale, description un paragrafo. Seguono autori, licenza e tag. In fondo, assets nomina l'icona e architectures dice quale file di cartuccia serve quale target. Il file si crea con un editor di testo nella cartella del gioco.
 DA COMPRENDERE OGGI: impacchettare e pubblicare.
 Per il docente: Create il file in ~/verm1 con un editor di testo. Nella slide la descrizione è tagliata. La riga abi dice di quale versione del formato dei metadati si tratta.</a:t>
             </a:r>

--- a/it/slides/23-Architettura_dei_Calcolatori-Verm1_sul_Cartridge_Store-Lab.pptx
+++ b/it/slides/23-Architettura_dei_Calcolatori-Verm1_sul_Cartridge_Store-Lab.pptx
@@ -123,42 +123,42 @@
   <p:extLst>
     <p:ext uri="{521415D9-36F7-43E2-AB2F-B90AF26B5E84}">
       <p14:sectionLst xmlns:p14="http://schemas.microsoft.com/office/powerpoint/2010/main">
-        <p14:section name="Apertura" id="{7a0fc15d-c272-ba77-8ddb-660b8cc03131}">
+        <p14:section name="Apertura" id="{e2d6189b-df8a-eaa3-2601-ac635d2a30e6}">
           <p14:sldIdLst>
             <p14:sldId id="256"/>
             <p14:sldId id="257"/>
           </p14:sldIdLst>
         </p14:section>
-        <p14:section name="Passo 1: un sorgente, due cartucce" id="{41870e77-a57f-81bc-571d-db64555eb8bd}">
+        <p14:section name="Passo 1: un sorgente, due cartucce" id="{765a11ab-2fc2-4c88-ae18-b17acab4c4e8}">
           <p14:sldIdLst>
             <p14:sldId id="258"/>
             <p14:sldId id="259"/>
           </p14:sldIdLst>
         </p14:section>
-        <p14:section name="Passo 2: un'identità" id="{782403c3-a6e1-8f58-2f0c-259a5c72690e}">
+        <p14:section name="Passo 2: un'identità" id="{eca0461b-296e-241a-941d-75da209317de}">
           <p14:sldIdLst>
             <p14:sldId id="260"/>
             <p14:sldId id="261"/>
           </p14:sldIdLst>
         </p14:section>
-        <p14:section name="Passo 3: la cartuccia porta con sé i documenti" id="{b3c9b401-ca4d-c706-9f4f-6378d33a7fe6}">
+        <p14:section name="Passo 3: la cartuccia porta con sé i documenti" id="{6ba1637b-268a-c00f-500a-a9fda3749754}">
           <p14:sldIdLst>
             <p14:sldId id="262"/>
             <p14:sldId id="263"/>
           </p14:sldIdLst>
         </p14:section>
-        <p14:section name="Passo 4: il bundle" id="{7b8a4575-85c1-dd9c-dd8f-5e524ff83287}">
+        <p14:section name="Passo 4: il bundle" id="{4a76c7bd-92da-3c7b-66c1-59f799e98fd1}">
           <p14:sldIdLst>
             <p14:sldId id="264"/>
             <p14:sldId id="265"/>
           </p14:sldIdLst>
         </p14:section>
-        <p14:section name="Passo 5: la pubblicazione" id="{83e41d6a-1a2d-8702-3529-8bcb082d3a7a}">
+        <p14:section name="Passo 5: la pubblicazione" id="{cda10ca0-5639-2988-2fb6-00deb5742214}">
           <p14:sldIdLst>
             <p14:sldId id="266"/>
           </p14:sldIdLst>
         </p14:section>
-        <p14:section name="Eseguire e provare" id="{42dd8ae2-0f17-b34f-2450-06e3dba301c1}">
+        <p14:section name="Eseguire e provare" id="{5f2727a2-906c-e550-ffd7-7a2da8382864}">
           <p14:sldIdLst>
             <p14:sldId id="267"/>
             <p14:sldId id="268"/>
@@ -167,7 +167,7 @@
             <p14:sldId id="271"/>
           </p14:sldIdLst>
         </p14:section>
-        <p14:section name="Esercizi" id="{b9395c9d-a170-2d41-560f-bd92671387df}">
+        <p14:section name="Esercizi" id="{8b0d7b5b-d51d-14fd-6add-f96371000e4a}">
           <p14:sldIdLst>
             <p14:sldId id="272"/>
           </p14:sldIdLst>
@@ -578,7 +578,8 @@
               <a:rPr lang="en-US" dirty="0"/>
               <a:t>Questa è la presentazione del codice della Lezione 23. Mentre la presentazione della lezione sviluppa i concetti, questa raccoglie tutto ciò che si scrive e si esegue: ogni listato con il suo commento, il programma completo della lezione, il risultato che deve produrre, e la procedura per provarlo su ciascuno dei tre host. Le due presentazioni vanno lette insieme: i concetti spiegano il codice, e il codice dà ai concetti una conseguenza osservabile.
 Stato di apprendimento: DA COMPRENDERE OGGI, alla fine di questa lezione lo spiegate, lo seguite passo passo e lo applicate da soli; DA UTILIZZARE OGGI, oggi seguite e usate la ricetta; come funziona dentro si spiega più avanti, o non fa parte del corso; DA COMPRENDERE PIÙ AVANTI, riconoscete il nome e lo scopo; lo spiega una lezione successiva. Una slide senza etichetta è contesto: una storia, un esempio, una domanda, un esercizio.
-Stato di apprendimento di questa lezione. DA COMPRENDERE OGGI: impacchettare e pubblicare; la cartuccia portabile. DA UTILIZZARE OGGI: gli strumenti di PRG32 (si usa, non si studia, in questo corso). DA COMPRENDERE PIÙ AVANTI: niente. Una slide senza etichetta è contesto: una storia, un esempio, una domanda, un esercizio.</a:t>
+Stato di apprendimento di questa lezione. DA COMPRENDERE OGGI: impacchettare e pubblicare; la cartuccia portabile. DA UTILIZZARE OGGI: gli strumenti di PRG32 (si usa, non si studia, in questo corso). DA COMPRENDERE PIÙ AVANTI: niente. Una slide senza etichetta è contesto: una storia, un esempio, una domanda, un esercizio.
+Percorso. I risultati di oggi: (1) compilare cartucce portabili e verificarle; (2) impacchettare un bundle con i metadati e pubblicarlo in sicurezza. Si appoggia su: solo ciò che ha preparato la Lezione 01. Prossimo passo: Lezione 24, Oltre un solo core: RISC-V superscalare, HPC, GPU e FPGA.</a:t>
             </a:r>
             <a:endParaRPr lang="en-US" dirty="0"/>
           </a:p>
